--- a/dist/초4/수학/도형/초4_수학_도형_06_다각형과대각선_학생용.pptx
+++ b/dist/초4/수학/도형/초4_수학_도형_06_다각형과대각선_학생용.pptx
@@ -120,13 +120,13 @@
   <p:extLst>
     <p:ext uri="{521415D9-36F7-43E2-AB2F-B90AF26B5E84}">
       <p14:sectionLst xmlns:p14="http://schemas.microsoft.com/office/powerpoint/2010/main">
-        <p14:section name="도입" id="{ea897f82-a09f-c8ff-d415-957955b6355a}">
+        <p14:section name="도입" id="{dc0e2aa6-9f21-5431-9899-653c49a40a08}">
           <p14:sldIdLst>
             <p14:sldId id="256"/>
             <p14:sldId id="257"/>
           </p14:sldIdLst>
         </p14:section>
-        <p14:section name="개념" id="{357230ab-e709-723c-352d-97f49cbed9d4}">
+        <p14:section name="개념" id="{6b011f68-8064-85bd-7b7d-119126b40481}">
           <p14:sldIdLst>
             <p14:sldId id="258"/>
             <p14:sldId id="260"/>
@@ -134,7 +134,7 @@
             <p14:sldId id="263"/>
           </p14:sldIdLst>
         </p14:section>
-        <p14:section name="연습" id="{462d0be5-66be-7b4d-ee72-029291a7cc78}">
+        <p14:section name="연습" id="{4c04e9f4-3075-248a-c813-042742f423fe}">
           <p14:sldIdLst>
             <p14:sldId id="259"/>
             <p14:sldId id="261"/>
@@ -142,30 +142,30 @@
             <p14:sldId id="265"/>
           </p14:sldIdLst>
         </p14:section>
-        <p14:section name="개념" id="{d9120dc6-310e-80d5-b9aa-69cd16d6a9e2}">
+        <p14:section name="개념" id="{9389649b-a272-c979-54a7-ec2c87081e0b}">
           <p14:sldIdLst/>
         </p14:section>
-        <p14:section name="연습" id="{992a4bd1-203b-17f2-8639-8237225d8f54}">
+        <p14:section name="연습" id="{3a444409-4957-554d-8ef4-b5d0249fadd9}">
           <p14:sldIdLst/>
         </p14:section>
-        <p14:section name="개념" id="{a9d7ca13-a7f0-1944-de83-3915a6fc86d3}">
+        <p14:section name="개념" id="{49016f23-3f91-8b87-322a-09191dfa09f9}">
           <p14:sldIdLst/>
         </p14:section>
-        <p14:section name="연습" id="{485df82c-b2ea-b16d-0cff-c0273e8b9e77}">
+        <p14:section name="연습" id="{ee3c59c4-cae0-b6bd-931c-400e04fdf394}">
           <p14:sldIdLst/>
         </p14:section>
-        <p14:section name="확인" id="{cb637505-7fe9-3419-2b76-cd208c61dd36}">
+        <p14:section name="확인" id="{bada486f-a148-970f-eee9-e9d552d31d73}">
           <p14:sldIdLst>
             <p14:sldId id="266"/>
             <p14:sldId id="267"/>
           </p14:sldIdLst>
         </p14:section>
-        <p14:section name="정리" id="{6e650701-365b-5a50-0929-6d50d8e67cc3}">
+        <p14:section name="정리" id="{d93c3601-bf29-f8c7-802e-7c5100947d48}">
           <p14:sldIdLst>
             <p14:sldId id="268"/>
           </p14:sldIdLst>
         </p14:section>
-        <p14:section name="보충" id="{ba956e9b-8884-43f2-a616-fde1d74d45a3}">
+        <p14:section name="보충" id="{f624a454-7472-a972-ed03-79e9932938a9}">
           <p14:sldIdLst>
             <p14:sldId id="269"/>
           </p14:sldIdLst>
@@ -8234,24 +8234,103 @@
         </p:nvSpPr>
         <p:spPr>
           <a:xfrm>
-            <a:off x="1297684" y="1259241"/>
-            <a:ext cx="1034800" cy="1034800"/>
-          </a:xfrm>
-          <a:prstGeom prst="pie">
-            <a:avLst>
-              <a:gd name="adj1" fmla="val 3600044"/>
-              <a:gd name="adj2" fmla="val 7199956"/>
-            </a:avLst>
-          </a:prstGeom>
+            <a:off x="1556390" y="1776641"/>
+            <a:ext cx="517388" cy="517400"/>
+          </a:xfrm>
+          <a:custGeom>
+            <a:avLst/>
+            <a:gdLst/>
+            <a:ahLst/>
+            <a:cxnLst/>
+            <a:rect l="l" t="t" r="r" b="b"/>
+            <a:pathLst>
+              <a:path w="517388" h="517400">
+                <a:moveTo>
+                  <a:pt x="258694" y="0"/>
+                </a:moveTo>
+                <a:lnTo>
+                  <a:pt x="0" y="448085"/>
+                </a:lnTo>
+                <a:lnTo>
+                  <a:pt x="19791" y="458942"/>
+                </a:lnTo>
+                <a:lnTo>
+                  <a:pt x="40037" y="468926"/>
+                </a:lnTo>
+                <a:lnTo>
+                  <a:pt x="60698" y="478017"/>
+                </a:lnTo>
+                <a:lnTo>
+                  <a:pt x="81737" y="486198"/>
+                </a:lnTo>
+                <a:lnTo>
+                  <a:pt x="103113" y="493454"/>
+                </a:lnTo>
+                <a:lnTo>
+                  <a:pt x="124784" y="499771"/>
+                </a:lnTo>
+                <a:lnTo>
+                  <a:pt x="146711" y="505136"/>
+                </a:lnTo>
+                <a:lnTo>
+                  <a:pt x="168851" y="509540"/>
+                </a:lnTo>
+                <a:lnTo>
+                  <a:pt x="191162" y="512974"/>
+                </a:lnTo>
+                <a:lnTo>
+                  <a:pt x="213601" y="515431"/>
+                </a:lnTo>
+                <a:lnTo>
+                  <a:pt x="236126" y="516907"/>
+                </a:lnTo>
+                <a:lnTo>
+                  <a:pt x="258694" y="517400"/>
+                </a:lnTo>
+                <a:lnTo>
+                  <a:pt x="281262" y="516907"/>
+                </a:lnTo>
+                <a:lnTo>
+                  <a:pt x="303787" y="515431"/>
+                </a:lnTo>
+                <a:lnTo>
+                  <a:pt x="326227" y="512974"/>
+                </a:lnTo>
+                <a:lnTo>
+                  <a:pt x="348538" y="509540"/>
+                </a:lnTo>
+                <a:lnTo>
+                  <a:pt x="370677" y="505136"/>
+                </a:lnTo>
+                <a:lnTo>
+                  <a:pt x="392604" y="499771"/>
+                </a:lnTo>
+                <a:lnTo>
+                  <a:pt x="414276" y="493454"/>
+                </a:lnTo>
+                <a:lnTo>
+                  <a:pt x="435651" y="486198"/>
+                </a:lnTo>
+                <a:lnTo>
+                  <a:pt x="456690" y="478017"/>
+                </a:lnTo>
+                <a:lnTo>
+                  <a:pt x="477352" y="468926"/>
+                </a:lnTo>
+                <a:lnTo>
+                  <a:pt x="497597" y="458942"/>
+                </a:lnTo>
+                <a:lnTo>
+                  <a:pt x="517388" y="448085"/>
+                </a:lnTo>
+                <a:close/>
+              </a:path>
+            </a:pathLst>
+          </a:custGeom>
           <a:solidFill>
             <a:srgbClr val="F2C14E"/>
           </a:solidFill>
-          <a:ln w="12700">
-            <a:solidFill>
-              <a:srgbClr val="F2C14E"/>
-            </a:solidFill>
-            <a:prstDash val="solid"/>
-          </a:ln>
+          <a:ln/>
         </p:spPr>
       </p:sp>
       <p:sp>
@@ -8262,24 +8341,103 @@
         </p:nvSpPr>
         <p:spPr>
           <a:xfrm>
-            <a:off x="122680" y="3294467"/>
-            <a:ext cx="1034800" cy="1034800"/>
-          </a:xfrm>
-          <a:prstGeom prst="pie">
-            <a:avLst>
-              <a:gd name="adj1" fmla="val 17999956"/>
-              <a:gd name="adj2" fmla="val 0"/>
-            </a:avLst>
-          </a:prstGeom>
+            <a:off x="640080" y="3363783"/>
+            <a:ext cx="517400" cy="448085"/>
+          </a:xfrm>
+          <a:custGeom>
+            <a:avLst/>
+            <a:gdLst/>
+            <a:ahLst/>
+            <a:cxnLst/>
+            <a:rect l="l" t="t" r="r" b="b"/>
+            <a:pathLst>
+              <a:path w="517400" h="448085">
+                <a:moveTo>
+                  <a:pt x="0" y="448085"/>
+                </a:moveTo>
+                <a:lnTo>
+                  <a:pt x="517400" y="448085"/>
+                </a:lnTo>
+                <a:lnTo>
+                  <a:pt x="516907" y="425516"/>
+                </a:lnTo>
+                <a:lnTo>
+                  <a:pt x="515431" y="402990"/>
+                </a:lnTo>
+                <a:lnTo>
+                  <a:pt x="512973" y="380550"/>
+                </a:lnTo>
+                <a:lnTo>
+                  <a:pt x="509539" y="358238"/>
+                </a:lnTo>
+                <a:lnTo>
+                  <a:pt x="505135" y="336097"/>
+                </a:lnTo>
+                <a:lnTo>
+                  <a:pt x="499769" y="314170"/>
+                </a:lnTo>
+                <a:lnTo>
+                  <a:pt x="493452" y="292498"/>
+                </a:lnTo>
+                <a:lnTo>
+                  <a:pt x="486196" y="271121"/>
+                </a:lnTo>
+                <a:lnTo>
+                  <a:pt x="478014" y="250082"/>
+                </a:lnTo>
+                <a:lnTo>
+                  <a:pt x="468922" y="229420"/>
+                </a:lnTo>
+                <a:lnTo>
+                  <a:pt x="458938" y="209173"/>
+                </a:lnTo>
+                <a:lnTo>
+                  <a:pt x="448080" y="189382"/>
+                </a:lnTo>
+                <a:lnTo>
+                  <a:pt x="436369" y="170083"/>
+                </a:lnTo>
+                <a:lnTo>
+                  <a:pt x="423827" y="151313"/>
+                </a:lnTo>
+                <a:lnTo>
+                  <a:pt x="410478" y="133108"/>
+                </a:lnTo>
+                <a:lnTo>
+                  <a:pt x="396348" y="115503"/>
+                </a:lnTo>
+                <a:lnTo>
+                  <a:pt x="381464" y="98531"/>
+                </a:lnTo>
+                <a:lnTo>
+                  <a:pt x="365853" y="82224"/>
+                </a:lnTo>
+                <a:lnTo>
+                  <a:pt x="349546" y="66614"/>
+                </a:lnTo>
+                <a:lnTo>
+                  <a:pt x="332574" y="51730"/>
+                </a:lnTo>
+                <a:lnTo>
+                  <a:pt x="314968" y="37600"/>
+                </a:lnTo>
+                <a:lnTo>
+                  <a:pt x="296763" y="24252"/>
+                </a:lnTo>
+                <a:lnTo>
+                  <a:pt x="277993" y="11711"/>
+                </a:lnTo>
+                <a:lnTo>
+                  <a:pt x="258694" y="0"/>
+                </a:lnTo>
+                <a:close/>
+              </a:path>
+            </a:pathLst>
+          </a:custGeom>
           <a:solidFill>
             <a:srgbClr val="F2C14E"/>
           </a:solidFill>
-          <a:ln w="12700">
-            <a:solidFill>
-              <a:srgbClr val="F2C14E"/>
-            </a:solidFill>
-            <a:prstDash val="solid"/>
-          </a:ln>
+          <a:ln/>
         </p:spPr>
       </p:sp>
       <p:sp>
@@ -8290,24 +8448,103 @@
         </p:nvSpPr>
         <p:spPr>
           <a:xfrm>
-            <a:off x="2472688" y="3294467"/>
-            <a:ext cx="1034800" cy="1034800"/>
-          </a:xfrm>
-          <a:prstGeom prst="pie">
-            <a:avLst>
-              <a:gd name="adj1" fmla="val 10800000"/>
-              <a:gd name="adj2" fmla="val 14400044"/>
-            </a:avLst>
-          </a:prstGeom>
+            <a:off x="2472688" y="3363783"/>
+            <a:ext cx="517400" cy="448085"/>
+          </a:xfrm>
+          <a:custGeom>
+            <a:avLst/>
+            <a:gdLst/>
+            <a:ahLst/>
+            <a:cxnLst/>
+            <a:rect l="l" t="t" r="r" b="b"/>
+            <a:pathLst>
+              <a:path w="517400" h="448085">
+                <a:moveTo>
+                  <a:pt x="517400" y="448085"/>
+                </a:moveTo>
+                <a:lnTo>
+                  <a:pt x="258706" y="0"/>
+                </a:lnTo>
+                <a:lnTo>
+                  <a:pt x="239406" y="11711"/>
+                </a:lnTo>
+                <a:lnTo>
+                  <a:pt x="220636" y="24252"/>
+                </a:lnTo>
+                <a:lnTo>
+                  <a:pt x="202431" y="37600"/>
+                </a:lnTo>
+                <a:lnTo>
+                  <a:pt x="184826" y="51730"/>
+                </a:lnTo>
+                <a:lnTo>
+                  <a:pt x="167853" y="66614"/>
+                </a:lnTo>
+                <a:lnTo>
+                  <a:pt x="151546" y="82224"/>
+                </a:lnTo>
+                <a:lnTo>
+                  <a:pt x="135936" y="98531"/>
+                </a:lnTo>
+                <a:lnTo>
+                  <a:pt x="121051" y="115503"/>
+                </a:lnTo>
+                <a:lnTo>
+                  <a:pt x="106921" y="133108"/>
+                </a:lnTo>
+                <a:lnTo>
+                  <a:pt x="93573" y="151313"/>
+                </a:lnTo>
+                <a:lnTo>
+                  <a:pt x="81031" y="170083"/>
+                </a:lnTo>
+                <a:lnTo>
+                  <a:pt x="69320" y="189382"/>
+                </a:lnTo>
+                <a:lnTo>
+                  <a:pt x="58462" y="209173"/>
+                </a:lnTo>
+                <a:lnTo>
+                  <a:pt x="48477" y="229420"/>
+                </a:lnTo>
+                <a:lnTo>
+                  <a:pt x="39386" y="250082"/>
+                </a:lnTo>
+                <a:lnTo>
+                  <a:pt x="31204" y="271121"/>
+                </a:lnTo>
+                <a:lnTo>
+                  <a:pt x="23947" y="292498"/>
+                </a:lnTo>
+                <a:lnTo>
+                  <a:pt x="17630" y="314170"/>
+                </a:lnTo>
+                <a:lnTo>
+                  <a:pt x="12265" y="336097"/>
+                </a:lnTo>
+                <a:lnTo>
+                  <a:pt x="7861" y="358238"/>
+                </a:lnTo>
+                <a:lnTo>
+                  <a:pt x="4427" y="380550"/>
+                </a:lnTo>
+                <a:lnTo>
+                  <a:pt x="1969" y="402990"/>
+                </a:lnTo>
+                <a:lnTo>
+                  <a:pt x="492" y="425516"/>
+                </a:lnTo>
+                <a:lnTo>
+                  <a:pt x="0" y="448085"/>
+                </a:lnTo>
+                <a:close/>
+              </a:path>
+            </a:pathLst>
+          </a:custGeom>
           <a:solidFill>
             <a:srgbClr val="F2C14E"/>
           </a:solidFill>
-          <a:ln w="12700">
-            <a:solidFill>
-              <a:srgbClr val="F2C14E"/>
-            </a:solidFill>
-            <a:prstDash val="solid"/>
-          </a:ln>
+          <a:ln/>
         </p:spPr>
       </p:sp>
       <p:sp>
@@ -8812,24 +9049,103 @@
         </p:nvSpPr>
         <p:spPr>
           <a:xfrm>
-            <a:off x="7201368" y="1357209"/>
-            <a:ext cx="639144" cy="639144"/>
-          </a:xfrm>
-          <a:prstGeom prst="pie">
-            <a:avLst>
-              <a:gd name="adj1" fmla="val 2160023"/>
-              <a:gd name="adj2" fmla="val 8639977"/>
-            </a:avLst>
-          </a:prstGeom>
+            <a:off x="7262402" y="1676781"/>
+            <a:ext cx="517076" cy="319572"/>
+          </a:xfrm>
+          <a:custGeom>
+            <a:avLst/>
+            <a:gdLst/>
+            <a:ahLst/>
+            <a:cxnLst/>
+            <a:rect l="l" t="t" r="r" b="b"/>
+            <a:pathLst>
+              <a:path w="517076" h="319572">
+                <a:moveTo>
+                  <a:pt x="258538" y="0"/>
+                </a:moveTo>
+                <a:lnTo>
+                  <a:pt x="0" y="187841"/>
+                </a:lnTo>
+                <a:lnTo>
+                  <a:pt x="15535" y="207547"/>
+                </a:lnTo>
+                <a:lnTo>
+                  <a:pt x="32568" y="225973"/>
+                </a:lnTo>
+                <a:lnTo>
+                  <a:pt x="50994" y="243006"/>
+                </a:lnTo>
+                <a:lnTo>
+                  <a:pt x="70699" y="258540"/>
+                </a:lnTo>
+                <a:lnTo>
+                  <a:pt x="91563" y="272481"/>
+                </a:lnTo>
+                <a:lnTo>
+                  <a:pt x="113456" y="284741"/>
+                </a:lnTo>
+                <a:lnTo>
+                  <a:pt x="136244" y="295246"/>
+                </a:lnTo>
+                <a:lnTo>
+                  <a:pt x="159785" y="303931"/>
+                </a:lnTo>
+                <a:lnTo>
+                  <a:pt x="183936" y="310742"/>
+                </a:lnTo>
+                <a:lnTo>
+                  <a:pt x="208546" y="315638"/>
+                </a:lnTo>
+                <a:lnTo>
+                  <a:pt x="233465" y="318587"/>
+                </a:lnTo>
+                <a:lnTo>
+                  <a:pt x="258538" y="319572"/>
+                </a:lnTo>
+                <a:lnTo>
+                  <a:pt x="283611" y="318587"/>
+                </a:lnTo>
+                <a:lnTo>
+                  <a:pt x="308530" y="315638"/>
+                </a:lnTo>
+                <a:lnTo>
+                  <a:pt x="333140" y="310742"/>
+                </a:lnTo>
+                <a:lnTo>
+                  <a:pt x="357291" y="303931"/>
+                </a:lnTo>
+                <a:lnTo>
+                  <a:pt x="380832" y="295246"/>
+                </a:lnTo>
+                <a:lnTo>
+                  <a:pt x="403620" y="284741"/>
+                </a:lnTo>
+                <a:lnTo>
+                  <a:pt x="425513" y="272481"/>
+                </a:lnTo>
+                <a:lnTo>
+                  <a:pt x="446377" y="258540"/>
+                </a:lnTo>
+                <a:lnTo>
+                  <a:pt x="466082" y="243006"/>
+                </a:lnTo>
+                <a:lnTo>
+                  <a:pt x="484508" y="225973"/>
+                </a:lnTo>
+                <a:lnTo>
+                  <a:pt x="501541" y="207547"/>
+                </a:lnTo>
+                <a:lnTo>
+                  <a:pt x="517076" y="187841"/>
+                </a:lnTo>
+                <a:close/>
+              </a:path>
+            </a:pathLst>
+          </a:custGeom>
           <a:solidFill>
             <a:srgbClr val="F2C14E"/>
           </a:solidFill>
-          <a:ln w="12700">
-            <a:solidFill>
-              <a:srgbClr val="F2C14E"/>
-            </a:solidFill>
-            <a:prstDash val="solid"/>
-          </a:ln>
+          <a:ln/>
         </p:spPr>
       </p:sp>
       <p:sp>
@@ -8840,24 +9156,103 @@
         </p:nvSpPr>
         <p:spPr>
           <a:xfrm>
-            <a:off x="6026364" y="2210911"/>
-            <a:ext cx="639144" cy="639144"/>
-          </a:xfrm>
-          <a:prstGeom prst="pie">
-            <a:avLst>
-              <a:gd name="adj1" fmla="val 19439977"/>
-              <a:gd name="adj2" fmla="val 4319982"/>
-            </a:avLst>
-          </a:prstGeom>
+            <a:off x="6345936" y="2342642"/>
+            <a:ext cx="319572" cy="491772"/>
+          </a:xfrm>
+          <a:custGeom>
+            <a:avLst/>
+            <a:gdLst/>
+            <a:ahLst/>
+            <a:cxnLst/>
+            <a:rect l="l" t="t" r="r" b="b"/>
+            <a:pathLst>
+              <a:path w="319572" h="491772">
+                <a:moveTo>
+                  <a:pt x="0" y="187841"/>
+                </a:moveTo>
+                <a:lnTo>
+                  <a:pt x="98755" y="491772"/>
+                </a:lnTo>
+                <a:lnTo>
+                  <a:pt x="122297" y="483087"/>
+                </a:lnTo>
+                <a:lnTo>
+                  <a:pt x="145084" y="472582"/>
+                </a:lnTo>
+                <a:lnTo>
+                  <a:pt x="166977" y="460321"/>
+                </a:lnTo>
+                <a:lnTo>
+                  <a:pt x="187841" y="446380"/>
+                </a:lnTo>
+                <a:lnTo>
+                  <a:pt x="207547" y="430845"/>
+                </a:lnTo>
+                <a:lnTo>
+                  <a:pt x="225973" y="413812"/>
+                </a:lnTo>
+                <a:lnTo>
+                  <a:pt x="243006" y="395386"/>
+                </a:lnTo>
+                <a:lnTo>
+                  <a:pt x="258540" y="375680"/>
+                </a:lnTo>
+                <a:lnTo>
+                  <a:pt x="272481" y="354816"/>
+                </a:lnTo>
+                <a:lnTo>
+                  <a:pt x="284742" y="332923"/>
+                </a:lnTo>
+                <a:lnTo>
+                  <a:pt x="295247" y="310135"/>
+                </a:lnTo>
+                <a:lnTo>
+                  <a:pt x="303932" y="286593"/>
+                </a:lnTo>
+                <a:lnTo>
+                  <a:pt x="310743" y="262442"/>
+                </a:lnTo>
+                <a:lnTo>
+                  <a:pt x="315638" y="237832"/>
+                </a:lnTo>
+                <a:lnTo>
+                  <a:pt x="318587" y="212913"/>
+                </a:lnTo>
+                <a:lnTo>
+                  <a:pt x="319572" y="187840"/>
+                </a:lnTo>
+                <a:lnTo>
+                  <a:pt x="318587" y="162766"/>
+                </a:lnTo>
+                <a:lnTo>
+                  <a:pt x="315637" y="137847"/>
+                </a:lnTo>
+                <a:lnTo>
+                  <a:pt x="310742" y="113237"/>
+                </a:lnTo>
+                <a:lnTo>
+                  <a:pt x="303930" y="89086"/>
+                </a:lnTo>
+                <a:lnTo>
+                  <a:pt x="295245" y="65545"/>
+                </a:lnTo>
+                <a:lnTo>
+                  <a:pt x="284740" y="42757"/>
+                </a:lnTo>
+                <a:lnTo>
+                  <a:pt x="272479" y="20864"/>
+                </a:lnTo>
+                <a:lnTo>
+                  <a:pt x="258538" y="0"/>
+                </a:lnTo>
+                <a:close/>
+              </a:path>
+            </a:pathLst>
+          </a:custGeom>
           <a:solidFill>
             <a:srgbClr val="F2C14E"/>
           </a:solidFill>
-          <a:ln w="12700">
-            <a:solidFill>
-              <a:srgbClr val="F2C14E"/>
-            </a:solidFill>
-            <a:prstDash val="solid"/>
-          </a:ln>
+          <a:ln/>
         </p:spPr>
       </p:sp>
       <p:sp>
@@ -8868,24 +9263,103 @@
         </p:nvSpPr>
         <p:spPr>
           <a:xfrm>
-            <a:off x="6475165" y="3592155"/>
-            <a:ext cx="639144" cy="639144"/>
-          </a:xfrm>
-          <a:prstGeom prst="pie">
-            <a:avLst>
-              <a:gd name="adj1" fmla="val 15119982"/>
-              <a:gd name="adj2" fmla="val 0"/>
-            </a:avLst>
-          </a:prstGeom>
+            <a:off x="6695982" y="3592155"/>
+            <a:ext cx="418327" cy="319572"/>
+          </a:xfrm>
+          <a:custGeom>
+            <a:avLst/>
+            <a:gdLst/>
+            <a:ahLst/>
+            <a:cxnLst/>
+            <a:rect l="l" t="t" r="r" b="b"/>
+            <a:pathLst>
+              <a:path w="418327" h="319572">
+                <a:moveTo>
+                  <a:pt x="98755" y="319572"/>
+                </a:moveTo>
+                <a:lnTo>
+                  <a:pt x="418327" y="319572"/>
+                </a:lnTo>
+                <a:lnTo>
+                  <a:pt x="417342" y="294499"/>
+                </a:lnTo>
+                <a:lnTo>
+                  <a:pt x="414392" y="269580"/>
+                </a:lnTo>
+                <a:lnTo>
+                  <a:pt x="409497" y="244969"/>
+                </a:lnTo>
+                <a:lnTo>
+                  <a:pt x="402686" y="220819"/>
+                </a:lnTo>
+                <a:lnTo>
+                  <a:pt x="394001" y="197277"/>
+                </a:lnTo>
+                <a:lnTo>
+                  <a:pt x="383495" y="174489"/>
+                </a:lnTo>
+                <a:lnTo>
+                  <a:pt x="371235" y="152596"/>
+                </a:lnTo>
+                <a:lnTo>
+                  <a:pt x="357294" y="131732"/>
+                </a:lnTo>
+                <a:lnTo>
+                  <a:pt x="341759" y="112026"/>
+                </a:lnTo>
+                <a:lnTo>
+                  <a:pt x="324726" y="93600"/>
+                </a:lnTo>
+                <a:lnTo>
+                  <a:pt x="306300" y="76567"/>
+                </a:lnTo>
+                <a:lnTo>
+                  <a:pt x="286594" y="61032"/>
+                </a:lnTo>
+                <a:lnTo>
+                  <a:pt x="265730" y="47092"/>
+                </a:lnTo>
+                <a:lnTo>
+                  <a:pt x="243837" y="34831"/>
+                </a:lnTo>
+                <a:lnTo>
+                  <a:pt x="221049" y="24326"/>
+                </a:lnTo>
+                <a:lnTo>
+                  <a:pt x="197507" y="15641"/>
+                </a:lnTo>
+                <a:lnTo>
+                  <a:pt x="173356" y="8830"/>
+                </a:lnTo>
+                <a:lnTo>
+                  <a:pt x="148746" y="3934"/>
+                </a:lnTo>
+                <a:lnTo>
+                  <a:pt x="123827" y="985"/>
+                </a:lnTo>
+                <a:lnTo>
+                  <a:pt x="98753" y="0"/>
+                </a:lnTo>
+                <a:lnTo>
+                  <a:pt x="73680" y="985"/>
+                </a:lnTo>
+                <a:lnTo>
+                  <a:pt x="48761" y="3935"/>
+                </a:lnTo>
+                <a:lnTo>
+                  <a:pt x="24151" y="8830"/>
+                </a:lnTo>
+                <a:lnTo>
+                  <a:pt x="0" y="15641"/>
+                </a:lnTo>
+                <a:close/>
+              </a:path>
+            </a:pathLst>
+          </a:custGeom>
           <a:solidFill>
             <a:srgbClr val="F2C14E"/>
           </a:solidFill>
-          <a:ln w="12700">
-            <a:solidFill>
-              <a:srgbClr val="F2C14E"/>
-            </a:solidFill>
-            <a:prstDash val="solid"/>
-          </a:ln>
+          <a:ln/>
         </p:spPr>
       </p:sp>
       <p:sp>
@@ -8897,23 +9371,102 @@
         <p:spPr>
           <a:xfrm>
             <a:off x="7927571" y="3592155"/>
-            <a:ext cx="639144" cy="639144"/>
-          </a:xfrm>
-          <a:prstGeom prst="pie">
-            <a:avLst>
-              <a:gd name="adj1" fmla="val 10800000"/>
-              <a:gd name="adj2" fmla="val 17280018"/>
-            </a:avLst>
-          </a:prstGeom>
+            <a:ext cx="418327" cy="319572"/>
+          </a:xfrm>
+          <a:custGeom>
+            <a:avLst/>
+            <a:gdLst/>
+            <a:ahLst/>
+            <a:cxnLst/>
+            <a:rect l="l" t="t" r="r" b="b"/>
+            <a:pathLst>
+              <a:path w="418327" h="319572">
+                <a:moveTo>
+                  <a:pt x="319572" y="319572"/>
+                </a:moveTo>
+                <a:lnTo>
+                  <a:pt x="418327" y="15641"/>
+                </a:lnTo>
+                <a:lnTo>
+                  <a:pt x="394176" y="8830"/>
+                </a:lnTo>
+                <a:lnTo>
+                  <a:pt x="369566" y="3935"/>
+                </a:lnTo>
+                <a:lnTo>
+                  <a:pt x="344647" y="985"/>
+                </a:lnTo>
+                <a:lnTo>
+                  <a:pt x="319573" y="0"/>
+                </a:lnTo>
+                <a:lnTo>
+                  <a:pt x="294500" y="985"/>
+                </a:lnTo>
+                <a:lnTo>
+                  <a:pt x="269581" y="3934"/>
+                </a:lnTo>
+                <a:lnTo>
+                  <a:pt x="244971" y="8830"/>
+                </a:lnTo>
+                <a:lnTo>
+                  <a:pt x="220820" y="15641"/>
+                </a:lnTo>
+                <a:lnTo>
+                  <a:pt x="197278" y="24326"/>
+                </a:lnTo>
+                <a:lnTo>
+                  <a:pt x="174490" y="34831"/>
+                </a:lnTo>
+                <a:lnTo>
+                  <a:pt x="152597" y="47092"/>
+                </a:lnTo>
+                <a:lnTo>
+                  <a:pt x="131733" y="61032"/>
+                </a:lnTo>
+                <a:lnTo>
+                  <a:pt x="112027" y="76567"/>
+                </a:lnTo>
+                <a:lnTo>
+                  <a:pt x="93601" y="93600"/>
+                </a:lnTo>
+                <a:lnTo>
+                  <a:pt x="76568" y="112026"/>
+                </a:lnTo>
+                <a:lnTo>
+                  <a:pt x="61033" y="131732"/>
+                </a:lnTo>
+                <a:lnTo>
+                  <a:pt x="47092" y="152596"/>
+                </a:lnTo>
+                <a:lnTo>
+                  <a:pt x="34831" y="174489"/>
+                </a:lnTo>
+                <a:lnTo>
+                  <a:pt x="24326" y="197277"/>
+                </a:lnTo>
+                <a:lnTo>
+                  <a:pt x="15641" y="220819"/>
+                </a:lnTo>
+                <a:lnTo>
+                  <a:pt x="8830" y="244969"/>
+                </a:lnTo>
+                <a:lnTo>
+                  <a:pt x="3934" y="269580"/>
+                </a:lnTo>
+                <a:lnTo>
+                  <a:pt x="985" y="294499"/>
+                </a:lnTo>
+                <a:lnTo>
+                  <a:pt x="0" y="319572"/>
+                </a:lnTo>
+                <a:close/>
+              </a:path>
+            </a:pathLst>
+          </a:custGeom>
           <a:solidFill>
             <a:srgbClr val="F2C14E"/>
           </a:solidFill>
-          <a:ln w="12700">
-            <a:solidFill>
-              <a:srgbClr val="F2C14E"/>
-            </a:solidFill>
-            <a:prstDash val="solid"/>
-          </a:ln>
+          <a:ln/>
         </p:spPr>
       </p:sp>
       <p:sp>
@@ -8924,24 +9477,103 @@
         </p:nvSpPr>
         <p:spPr>
           <a:xfrm>
-            <a:off x="8376372" y="2210911"/>
-            <a:ext cx="639144" cy="639144"/>
-          </a:xfrm>
-          <a:prstGeom prst="pie">
-            <a:avLst>
-              <a:gd name="adj1" fmla="val 6480018"/>
-              <a:gd name="adj2" fmla="val 12960023"/>
-            </a:avLst>
-          </a:prstGeom>
+            <a:off x="8376372" y="2342642"/>
+            <a:ext cx="319572" cy="491772"/>
+          </a:xfrm>
+          <a:custGeom>
+            <a:avLst/>
+            <a:gdLst/>
+            <a:ahLst/>
+            <a:cxnLst/>
+            <a:rect l="l" t="t" r="r" b="b"/>
+            <a:pathLst>
+              <a:path w="319572" h="491772">
+                <a:moveTo>
+                  <a:pt x="319572" y="187841"/>
+                </a:moveTo>
+                <a:lnTo>
+                  <a:pt x="61034" y="0"/>
+                </a:lnTo>
+                <a:lnTo>
+                  <a:pt x="47093" y="20864"/>
+                </a:lnTo>
+                <a:lnTo>
+                  <a:pt x="34832" y="42757"/>
+                </a:lnTo>
+                <a:lnTo>
+                  <a:pt x="24327" y="65545"/>
+                </a:lnTo>
+                <a:lnTo>
+                  <a:pt x="15642" y="89086"/>
+                </a:lnTo>
+                <a:lnTo>
+                  <a:pt x="8830" y="113237"/>
+                </a:lnTo>
+                <a:lnTo>
+                  <a:pt x="3935" y="137847"/>
+                </a:lnTo>
+                <a:lnTo>
+                  <a:pt x="985" y="162766"/>
+                </a:lnTo>
+                <a:lnTo>
+                  <a:pt x="0" y="187840"/>
+                </a:lnTo>
+                <a:lnTo>
+                  <a:pt x="985" y="212913"/>
+                </a:lnTo>
+                <a:lnTo>
+                  <a:pt x="3934" y="237832"/>
+                </a:lnTo>
+                <a:lnTo>
+                  <a:pt x="8829" y="262442"/>
+                </a:lnTo>
+                <a:lnTo>
+                  <a:pt x="15640" y="286593"/>
+                </a:lnTo>
+                <a:lnTo>
+                  <a:pt x="24325" y="310135"/>
+                </a:lnTo>
+                <a:lnTo>
+                  <a:pt x="34830" y="332923"/>
+                </a:lnTo>
+                <a:lnTo>
+                  <a:pt x="47091" y="354816"/>
+                </a:lnTo>
+                <a:lnTo>
+                  <a:pt x="61032" y="375680"/>
+                </a:lnTo>
+                <a:lnTo>
+                  <a:pt x="76566" y="395386"/>
+                </a:lnTo>
+                <a:lnTo>
+                  <a:pt x="93599" y="413812"/>
+                </a:lnTo>
+                <a:lnTo>
+                  <a:pt x="112025" y="430845"/>
+                </a:lnTo>
+                <a:lnTo>
+                  <a:pt x="131731" y="446380"/>
+                </a:lnTo>
+                <a:lnTo>
+                  <a:pt x="152595" y="460321"/>
+                </a:lnTo>
+                <a:lnTo>
+                  <a:pt x="174488" y="472582"/>
+                </a:lnTo>
+                <a:lnTo>
+                  <a:pt x="197276" y="483087"/>
+                </a:lnTo>
+                <a:lnTo>
+                  <a:pt x="220817" y="491772"/>
+                </a:lnTo>
+                <a:close/>
+              </a:path>
+            </a:pathLst>
+          </a:custGeom>
           <a:solidFill>
             <a:srgbClr val="F2C14E"/>
           </a:solidFill>
-          <a:ln w="12700">
-            <a:solidFill>
-              <a:srgbClr val="F2C14E"/>
-            </a:solidFill>
-            <a:prstDash val="solid"/>
-          </a:ln>
+          <a:ln/>
         </p:spPr>
       </p:sp>
       <p:sp>
@@ -9158,24 +9790,103 @@
         </p:nvSpPr>
         <p:spPr>
           <a:xfrm>
-            <a:off x="10075368" y="1138937"/>
-            <a:ext cx="597000" cy="597000"/>
-          </a:xfrm>
-          <a:prstGeom prst="pie">
-            <a:avLst>
-              <a:gd name="adj1" fmla="val 1800044"/>
-              <a:gd name="adj2" fmla="val 8999956"/>
-            </a:avLst>
-          </a:prstGeom>
+            <a:off x="10115361" y="1437436"/>
+            <a:ext cx="517013" cy="298500"/>
+          </a:xfrm>
+          <a:custGeom>
+            <a:avLst/>
+            <a:gdLst/>
+            <a:ahLst/>
+            <a:cxnLst/>
+            <a:rect l="l" t="t" r="r" b="b"/>
+            <a:pathLst>
+              <a:path w="517013" h="298500">
+                <a:moveTo>
+                  <a:pt x="258507" y="0"/>
+                </a:moveTo>
+                <a:lnTo>
+                  <a:pt x="0" y="149253"/>
+                </a:lnTo>
+                <a:lnTo>
+                  <a:pt x="13992" y="171215"/>
+                </a:lnTo>
+                <a:lnTo>
+                  <a:pt x="29844" y="191874"/>
+                </a:lnTo>
+                <a:lnTo>
+                  <a:pt x="47437" y="211073"/>
+                </a:lnTo>
+                <a:lnTo>
+                  <a:pt x="66636" y="228666"/>
+                </a:lnTo>
+                <a:lnTo>
+                  <a:pt x="87296" y="244518"/>
+                </a:lnTo>
+                <a:lnTo>
+                  <a:pt x="109258" y="258509"/>
+                </a:lnTo>
+                <a:lnTo>
+                  <a:pt x="132357" y="270533"/>
+                </a:lnTo>
+                <a:lnTo>
+                  <a:pt x="156415" y="280499"/>
+                </a:lnTo>
+                <a:lnTo>
+                  <a:pt x="181250" y="288329"/>
+                </a:lnTo>
+                <a:lnTo>
+                  <a:pt x="206673" y="293965"/>
+                </a:lnTo>
+                <a:lnTo>
+                  <a:pt x="232491" y="297364"/>
+                </a:lnTo>
+                <a:lnTo>
+                  <a:pt x="258507" y="298500"/>
+                </a:lnTo>
+                <a:lnTo>
+                  <a:pt x="284522" y="297364"/>
+                </a:lnTo>
+                <a:lnTo>
+                  <a:pt x="310340" y="293965"/>
+                </a:lnTo>
+                <a:lnTo>
+                  <a:pt x="335763" y="288329"/>
+                </a:lnTo>
+                <a:lnTo>
+                  <a:pt x="360598" y="280499"/>
+                </a:lnTo>
+                <a:lnTo>
+                  <a:pt x="384657" y="270533"/>
+                </a:lnTo>
+                <a:lnTo>
+                  <a:pt x="407755" y="258509"/>
+                </a:lnTo>
+                <a:lnTo>
+                  <a:pt x="429717" y="244518"/>
+                </a:lnTo>
+                <a:lnTo>
+                  <a:pt x="450377" y="228666"/>
+                </a:lnTo>
+                <a:lnTo>
+                  <a:pt x="469576" y="211073"/>
+                </a:lnTo>
+                <a:lnTo>
+                  <a:pt x="487169" y="191874"/>
+                </a:lnTo>
+                <a:lnTo>
+                  <a:pt x="503021" y="171215"/>
+                </a:lnTo>
+                <a:lnTo>
+                  <a:pt x="517013" y="149253"/>
+                </a:lnTo>
+                <a:close/>
+              </a:path>
+            </a:pathLst>
+          </a:custGeom>
           <a:solidFill>
             <a:srgbClr val="F2C14E"/>
           </a:solidFill>
-          <a:ln w="12700">
-            <a:solidFill>
-              <a:srgbClr val="F2C14E"/>
-            </a:solidFill>
-            <a:prstDash val="solid"/>
-          </a:ln>
+          <a:ln/>
         </p:spPr>
       </p:sp>
       <p:sp>
@@ -9186,24 +9897,103 @@
         </p:nvSpPr>
         <p:spPr>
           <a:xfrm>
-            <a:off x="8900364" y="1817345"/>
-            <a:ext cx="597000" cy="597000"/>
-          </a:xfrm>
-          <a:prstGeom prst="pie">
-            <a:avLst>
-              <a:gd name="adj1" fmla="val 19799956"/>
-              <a:gd name="adj2" fmla="val 5400000"/>
-            </a:avLst>
-          </a:prstGeom>
+            <a:off x="9198864" y="1966592"/>
+            <a:ext cx="298500" cy="447753"/>
+          </a:xfrm>
+          <a:custGeom>
+            <a:avLst/>
+            <a:gdLst/>
+            <a:ahLst/>
+            <a:cxnLst/>
+            <a:rect l="l" t="t" r="r" b="b"/>
+            <a:pathLst>
+              <a:path w="298500" h="447753">
+                <a:moveTo>
+                  <a:pt x="0" y="149253"/>
+                </a:moveTo>
+                <a:lnTo>
+                  <a:pt x="0" y="447753"/>
+                </a:lnTo>
+                <a:lnTo>
+                  <a:pt x="26016" y="446617"/>
+                </a:lnTo>
+                <a:lnTo>
+                  <a:pt x="51834" y="443218"/>
+                </a:lnTo>
+                <a:lnTo>
+                  <a:pt x="77258" y="437582"/>
+                </a:lnTo>
+                <a:lnTo>
+                  <a:pt x="102094" y="429751"/>
+                </a:lnTo>
+                <a:lnTo>
+                  <a:pt x="126152" y="419786"/>
+                </a:lnTo>
+                <a:lnTo>
+                  <a:pt x="149251" y="407761"/>
+                </a:lnTo>
+                <a:lnTo>
+                  <a:pt x="171213" y="393769"/>
+                </a:lnTo>
+                <a:lnTo>
+                  <a:pt x="191873" y="377917"/>
+                </a:lnTo>
+                <a:lnTo>
+                  <a:pt x="211072" y="360323"/>
+                </a:lnTo>
+                <a:lnTo>
+                  <a:pt x="228665" y="341124"/>
+                </a:lnTo>
+                <a:lnTo>
+                  <a:pt x="244518" y="320464"/>
+                </a:lnTo>
+                <a:lnTo>
+                  <a:pt x="258509" y="298502"/>
+                </a:lnTo>
+                <a:lnTo>
+                  <a:pt x="270534" y="275403"/>
+                </a:lnTo>
+                <a:lnTo>
+                  <a:pt x="280499" y="251344"/>
+                </a:lnTo>
+                <a:lnTo>
+                  <a:pt x="288329" y="226508"/>
+                </a:lnTo>
+                <a:lnTo>
+                  <a:pt x="293965" y="201085"/>
+                </a:lnTo>
+                <a:lnTo>
+                  <a:pt x="297364" y="175267"/>
+                </a:lnTo>
+                <a:lnTo>
+                  <a:pt x="298500" y="149250"/>
+                </a:lnTo>
+                <a:lnTo>
+                  <a:pt x="297364" y="123234"/>
+                </a:lnTo>
+                <a:lnTo>
+                  <a:pt x="293964" y="97416"/>
+                </a:lnTo>
+                <a:lnTo>
+                  <a:pt x="288328" y="71993"/>
+                </a:lnTo>
+                <a:lnTo>
+                  <a:pt x="280497" y="47157"/>
+                </a:lnTo>
+                <a:lnTo>
+                  <a:pt x="270531" y="23098"/>
+                </a:lnTo>
+                <a:lnTo>
+                  <a:pt x="258507" y="0"/>
+                </a:lnTo>
+                <a:close/>
+              </a:path>
+            </a:pathLst>
+          </a:custGeom>
           <a:solidFill>
             <a:srgbClr val="F2C14E"/>
           </a:solidFill>
-          <a:ln w="12700">
-            <a:solidFill>
-              <a:srgbClr val="F2C14E"/>
-            </a:solidFill>
-            <a:prstDash val="solid"/>
-          </a:ln>
+          <a:ln/>
         </p:spPr>
       </p:sp>
       <p:sp>
@@ -9214,24 +10004,103 @@
         </p:nvSpPr>
         <p:spPr>
           <a:xfrm>
-            <a:off x="8900364" y="3174163"/>
-            <a:ext cx="597000" cy="597000"/>
-          </a:xfrm>
-          <a:prstGeom prst="pie">
-            <a:avLst>
-              <a:gd name="adj1" fmla="val 16200000"/>
-              <a:gd name="adj2" fmla="val 1800044"/>
-            </a:avLst>
-          </a:prstGeom>
+            <a:off x="9198864" y="3174163"/>
+            <a:ext cx="298500" cy="447753"/>
+          </a:xfrm>
+          <a:custGeom>
+            <a:avLst/>
+            <a:gdLst/>
+            <a:ahLst/>
+            <a:cxnLst/>
+            <a:rect l="l" t="t" r="r" b="b"/>
+            <a:pathLst>
+              <a:path w="298500" h="447753">
+                <a:moveTo>
+                  <a:pt x="0" y="298500"/>
+                </a:moveTo>
+                <a:lnTo>
+                  <a:pt x="258507" y="447753"/>
+                </a:lnTo>
+                <a:lnTo>
+                  <a:pt x="270531" y="424655"/>
+                </a:lnTo>
+                <a:lnTo>
+                  <a:pt x="280497" y="400596"/>
+                </a:lnTo>
+                <a:lnTo>
+                  <a:pt x="288328" y="375761"/>
+                </a:lnTo>
+                <a:lnTo>
+                  <a:pt x="293964" y="350337"/>
+                </a:lnTo>
+                <a:lnTo>
+                  <a:pt x="297364" y="324519"/>
+                </a:lnTo>
+                <a:lnTo>
+                  <a:pt x="298500" y="298503"/>
+                </a:lnTo>
+                <a:lnTo>
+                  <a:pt x="297364" y="272487"/>
+                </a:lnTo>
+                <a:lnTo>
+                  <a:pt x="293965" y="246668"/>
+                </a:lnTo>
+                <a:lnTo>
+                  <a:pt x="288329" y="221245"/>
+                </a:lnTo>
+                <a:lnTo>
+                  <a:pt x="280499" y="196409"/>
+                </a:lnTo>
+                <a:lnTo>
+                  <a:pt x="270534" y="172350"/>
+                </a:lnTo>
+                <a:lnTo>
+                  <a:pt x="258509" y="149252"/>
+                </a:lnTo>
+                <a:lnTo>
+                  <a:pt x="244518" y="127289"/>
+                </a:lnTo>
+                <a:lnTo>
+                  <a:pt x="228665" y="106629"/>
+                </a:lnTo>
+                <a:lnTo>
+                  <a:pt x="211072" y="87430"/>
+                </a:lnTo>
+                <a:lnTo>
+                  <a:pt x="191873" y="69837"/>
+                </a:lnTo>
+                <a:lnTo>
+                  <a:pt x="171213" y="53984"/>
+                </a:lnTo>
+                <a:lnTo>
+                  <a:pt x="149251" y="39992"/>
+                </a:lnTo>
+                <a:lnTo>
+                  <a:pt x="126152" y="27967"/>
+                </a:lnTo>
+                <a:lnTo>
+                  <a:pt x="102094" y="18002"/>
+                </a:lnTo>
+                <a:lnTo>
+                  <a:pt x="77258" y="10171"/>
+                </a:lnTo>
+                <a:lnTo>
+                  <a:pt x="51834" y="4535"/>
+                </a:lnTo>
+                <a:lnTo>
+                  <a:pt x="26016" y="1136"/>
+                </a:lnTo>
+                <a:lnTo>
+                  <a:pt x="0" y="0"/>
+                </a:lnTo>
+                <a:close/>
+              </a:path>
+            </a:pathLst>
+          </a:custGeom>
           <a:solidFill>
             <a:srgbClr val="F2C14E"/>
           </a:solidFill>
-          <a:ln w="12700">
-            <a:solidFill>
-              <a:srgbClr val="F2C14E"/>
-            </a:solidFill>
-            <a:prstDash val="solid"/>
-          </a:ln>
+          <a:ln/>
         </p:spPr>
       </p:sp>
       <p:sp>
@@ -9242,24 +10111,103 @@
         </p:nvSpPr>
         <p:spPr>
           <a:xfrm>
-            <a:off x="10075368" y="3852572"/>
-            <a:ext cx="597000" cy="597000"/>
-          </a:xfrm>
-          <a:prstGeom prst="pie">
-            <a:avLst>
-              <a:gd name="adj1" fmla="val 12600044"/>
-              <a:gd name="adj2" fmla="val 19799956"/>
-            </a:avLst>
-          </a:prstGeom>
+            <a:off x="10115361" y="3852572"/>
+            <a:ext cx="517013" cy="298500"/>
+          </a:xfrm>
+          <a:custGeom>
+            <a:avLst/>
+            <a:gdLst/>
+            <a:ahLst/>
+            <a:cxnLst/>
+            <a:rect l="l" t="t" r="r" b="b"/>
+            <a:pathLst>
+              <a:path w="517013" h="298500">
+                <a:moveTo>
+                  <a:pt x="258507" y="298500"/>
+                </a:moveTo>
+                <a:lnTo>
+                  <a:pt x="517013" y="149247"/>
+                </a:lnTo>
+                <a:lnTo>
+                  <a:pt x="503021" y="127285"/>
+                </a:lnTo>
+                <a:lnTo>
+                  <a:pt x="487169" y="106625"/>
+                </a:lnTo>
+                <a:lnTo>
+                  <a:pt x="469576" y="87427"/>
+                </a:lnTo>
+                <a:lnTo>
+                  <a:pt x="450377" y="69834"/>
+                </a:lnTo>
+                <a:lnTo>
+                  <a:pt x="429717" y="53982"/>
+                </a:lnTo>
+                <a:lnTo>
+                  <a:pt x="407755" y="39990"/>
+                </a:lnTo>
+                <a:lnTo>
+                  <a:pt x="384657" y="27966"/>
+                </a:lnTo>
+                <a:lnTo>
+                  <a:pt x="360598" y="18001"/>
+                </a:lnTo>
+                <a:lnTo>
+                  <a:pt x="335763" y="10171"/>
+                </a:lnTo>
+                <a:lnTo>
+                  <a:pt x="310340" y="4535"/>
+                </a:lnTo>
+                <a:lnTo>
+                  <a:pt x="284522" y="1136"/>
+                </a:lnTo>
+                <a:lnTo>
+                  <a:pt x="258507" y="0"/>
+                </a:lnTo>
+                <a:lnTo>
+                  <a:pt x="232491" y="1136"/>
+                </a:lnTo>
+                <a:lnTo>
+                  <a:pt x="206673" y="4535"/>
+                </a:lnTo>
+                <a:lnTo>
+                  <a:pt x="181250" y="10171"/>
+                </a:lnTo>
+                <a:lnTo>
+                  <a:pt x="156415" y="18001"/>
+                </a:lnTo>
+                <a:lnTo>
+                  <a:pt x="132357" y="27966"/>
+                </a:lnTo>
+                <a:lnTo>
+                  <a:pt x="109258" y="39990"/>
+                </a:lnTo>
+                <a:lnTo>
+                  <a:pt x="87296" y="53982"/>
+                </a:lnTo>
+                <a:lnTo>
+                  <a:pt x="66636" y="69834"/>
+                </a:lnTo>
+                <a:lnTo>
+                  <a:pt x="47437" y="87427"/>
+                </a:lnTo>
+                <a:lnTo>
+                  <a:pt x="29844" y="106625"/>
+                </a:lnTo>
+                <a:lnTo>
+                  <a:pt x="13992" y="127285"/>
+                </a:lnTo>
+                <a:lnTo>
+                  <a:pt x="0" y="149247"/>
+                </a:lnTo>
+                <a:close/>
+              </a:path>
+            </a:pathLst>
+          </a:custGeom>
           <a:solidFill>
             <a:srgbClr val="F2C14E"/>
           </a:solidFill>
-          <a:ln w="12700">
-            <a:solidFill>
-              <a:srgbClr val="F2C14E"/>
-            </a:solidFill>
-            <a:prstDash val="solid"/>
-          </a:ln>
+          <a:ln/>
         </p:spPr>
       </p:sp>
       <p:sp>
@@ -9271,23 +10219,102 @@
         <p:spPr>
           <a:xfrm>
             <a:off x="11250372" y="3174163"/>
-            <a:ext cx="597000" cy="597000"/>
-          </a:xfrm>
-          <a:prstGeom prst="pie">
-            <a:avLst>
-              <a:gd name="adj1" fmla="val 8999956"/>
-              <a:gd name="adj2" fmla="val 16200000"/>
-            </a:avLst>
-          </a:prstGeom>
+            <a:ext cx="298500" cy="447753"/>
+          </a:xfrm>
+          <a:custGeom>
+            <a:avLst/>
+            <a:gdLst/>
+            <a:ahLst/>
+            <a:cxnLst/>
+            <a:rect l="l" t="t" r="r" b="b"/>
+            <a:pathLst>
+              <a:path w="298500" h="447753">
+                <a:moveTo>
+                  <a:pt x="298500" y="298500"/>
+                </a:moveTo>
+                <a:lnTo>
+                  <a:pt x="298500" y="0"/>
+                </a:lnTo>
+                <a:lnTo>
+                  <a:pt x="272484" y="1136"/>
+                </a:lnTo>
+                <a:lnTo>
+                  <a:pt x="246666" y="4535"/>
+                </a:lnTo>
+                <a:lnTo>
+                  <a:pt x="221242" y="10171"/>
+                </a:lnTo>
+                <a:lnTo>
+                  <a:pt x="196406" y="18002"/>
+                </a:lnTo>
+                <a:lnTo>
+                  <a:pt x="172348" y="27967"/>
+                </a:lnTo>
+                <a:lnTo>
+                  <a:pt x="149249" y="39992"/>
+                </a:lnTo>
+                <a:lnTo>
+                  <a:pt x="127286" y="53984"/>
+                </a:lnTo>
+                <a:lnTo>
+                  <a:pt x="106627" y="69837"/>
+                </a:lnTo>
+                <a:lnTo>
+                  <a:pt x="87428" y="87430"/>
+                </a:lnTo>
+                <a:lnTo>
+                  <a:pt x="69835" y="106629"/>
+                </a:lnTo>
+                <a:lnTo>
+                  <a:pt x="53982" y="127289"/>
+                </a:lnTo>
+                <a:lnTo>
+                  <a:pt x="39990" y="149252"/>
+                </a:lnTo>
+                <a:lnTo>
+                  <a:pt x="27966" y="172350"/>
+                </a:lnTo>
+                <a:lnTo>
+                  <a:pt x="18001" y="196409"/>
+                </a:lnTo>
+                <a:lnTo>
+                  <a:pt x="10171" y="221245"/>
+                </a:lnTo>
+                <a:lnTo>
+                  <a:pt x="4534" y="246668"/>
+                </a:lnTo>
+                <a:lnTo>
+                  <a:pt x="1136" y="272487"/>
+                </a:lnTo>
+                <a:lnTo>
+                  <a:pt x="0" y="298503"/>
+                </a:lnTo>
+                <a:lnTo>
+                  <a:pt x="1136" y="324519"/>
+                </a:lnTo>
+                <a:lnTo>
+                  <a:pt x="4535" y="350337"/>
+                </a:lnTo>
+                <a:lnTo>
+                  <a:pt x="10172" y="375761"/>
+                </a:lnTo>
+                <a:lnTo>
+                  <a:pt x="18003" y="400596"/>
+                </a:lnTo>
+                <a:lnTo>
+                  <a:pt x="27969" y="424655"/>
+                </a:lnTo>
+                <a:lnTo>
+                  <a:pt x="39993" y="447753"/>
+                </a:lnTo>
+                <a:close/>
+              </a:path>
+            </a:pathLst>
+          </a:custGeom>
           <a:solidFill>
             <a:srgbClr val="F2C14E"/>
           </a:solidFill>
-          <a:ln w="12700">
-            <a:solidFill>
-              <a:srgbClr val="F2C14E"/>
-            </a:solidFill>
-            <a:prstDash val="solid"/>
-          </a:ln>
+          <a:ln/>
         </p:spPr>
       </p:sp>
       <p:sp>
@@ -9298,24 +10325,103 @@
         </p:nvSpPr>
         <p:spPr>
           <a:xfrm>
-            <a:off x="11250372" y="1817345"/>
-            <a:ext cx="597000" cy="597000"/>
-          </a:xfrm>
-          <a:prstGeom prst="pie">
-            <a:avLst>
-              <a:gd name="adj1" fmla="val 5400000"/>
-              <a:gd name="adj2" fmla="val 12600044"/>
-            </a:avLst>
-          </a:prstGeom>
+            <a:off x="11250372" y="1966592"/>
+            <a:ext cx="298500" cy="447753"/>
+          </a:xfrm>
+          <a:custGeom>
+            <a:avLst/>
+            <a:gdLst/>
+            <a:ahLst/>
+            <a:cxnLst/>
+            <a:rect l="l" t="t" r="r" b="b"/>
+            <a:pathLst>
+              <a:path w="298500" h="447753">
+                <a:moveTo>
+                  <a:pt x="298500" y="149253"/>
+                </a:moveTo>
+                <a:lnTo>
+                  <a:pt x="39993" y="0"/>
+                </a:lnTo>
+                <a:lnTo>
+                  <a:pt x="27969" y="23098"/>
+                </a:lnTo>
+                <a:lnTo>
+                  <a:pt x="18003" y="47157"/>
+                </a:lnTo>
+                <a:lnTo>
+                  <a:pt x="10172" y="71993"/>
+                </a:lnTo>
+                <a:lnTo>
+                  <a:pt x="4535" y="97416"/>
+                </a:lnTo>
+                <a:lnTo>
+                  <a:pt x="1136" y="123234"/>
+                </a:lnTo>
+                <a:lnTo>
+                  <a:pt x="0" y="149250"/>
+                </a:lnTo>
+                <a:lnTo>
+                  <a:pt x="1136" y="175267"/>
+                </a:lnTo>
+                <a:lnTo>
+                  <a:pt x="4534" y="201085"/>
+                </a:lnTo>
+                <a:lnTo>
+                  <a:pt x="10171" y="226508"/>
+                </a:lnTo>
+                <a:lnTo>
+                  <a:pt x="18001" y="251344"/>
+                </a:lnTo>
+                <a:lnTo>
+                  <a:pt x="27966" y="275403"/>
+                </a:lnTo>
+                <a:lnTo>
+                  <a:pt x="39990" y="298502"/>
+                </a:lnTo>
+                <a:lnTo>
+                  <a:pt x="53982" y="320464"/>
+                </a:lnTo>
+                <a:lnTo>
+                  <a:pt x="69835" y="341124"/>
+                </a:lnTo>
+                <a:lnTo>
+                  <a:pt x="87428" y="360323"/>
+                </a:lnTo>
+                <a:lnTo>
+                  <a:pt x="106627" y="377917"/>
+                </a:lnTo>
+                <a:lnTo>
+                  <a:pt x="127286" y="393769"/>
+                </a:lnTo>
+                <a:lnTo>
+                  <a:pt x="149249" y="407761"/>
+                </a:lnTo>
+                <a:lnTo>
+                  <a:pt x="172348" y="419786"/>
+                </a:lnTo>
+                <a:lnTo>
+                  <a:pt x="196406" y="429751"/>
+                </a:lnTo>
+                <a:lnTo>
+                  <a:pt x="221242" y="437582"/>
+                </a:lnTo>
+                <a:lnTo>
+                  <a:pt x="246666" y="443218"/>
+                </a:lnTo>
+                <a:lnTo>
+                  <a:pt x="272484" y="446617"/>
+                </a:lnTo>
+                <a:lnTo>
+                  <a:pt x="298500" y="447753"/>
+                </a:lnTo>
+                <a:close/>
+              </a:path>
+            </a:pathLst>
+          </a:custGeom>
           <a:solidFill>
             <a:srgbClr val="F2C14E"/>
           </a:solidFill>
-          <a:ln w="12700">
-            <a:solidFill>
-              <a:srgbClr val="F2C14E"/>
-            </a:solidFill>
-            <a:prstDash val="solid"/>
-          </a:ln>
+          <a:ln/>
         </p:spPr>
       </p:sp>
       <p:sp>
@@ -9779,24 +10885,103 @@
         </p:nvSpPr>
         <p:spPr>
           <a:xfrm>
-            <a:off x="1616774" y="2560891"/>
-            <a:ext cx="867537" cy="867537"/>
-          </a:xfrm>
-          <a:prstGeom prst="pie">
-            <a:avLst>
-              <a:gd name="adj1" fmla="val 18412194"/>
-              <a:gd name="adj2" fmla="val 0"/>
-            </a:avLst>
-          </a:prstGeom>
+            <a:off x="2050542" y="2647645"/>
+            <a:ext cx="433769" cy="347015"/>
+          </a:xfrm>
+          <a:custGeom>
+            <a:avLst/>
+            <a:gdLst/>
+            <a:ahLst/>
+            <a:cxnLst/>
+            <a:rect l="l" t="t" r="r" b="b"/>
+            <a:pathLst>
+              <a:path w="433769" h="347015">
+                <a:moveTo>
+                  <a:pt x="0" y="347015"/>
+                </a:moveTo>
+                <a:lnTo>
+                  <a:pt x="433769" y="347015"/>
+                </a:lnTo>
+                <a:lnTo>
+                  <a:pt x="433445" y="330259"/>
+                </a:lnTo>
+                <a:lnTo>
+                  <a:pt x="432474" y="313529"/>
+                </a:lnTo>
+                <a:lnTo>
+                  <a:pt x="430858" y="296848"/>
+                </a:lnTo>
+                <a:lnTo>
+                  <a:pt x="428598" y="280243"/>
+                </a:lnTo>
+                <a:lnTo>
+                  <a:pt x="425699" y="263737"/>
+                </a:lnTo>
+                <a:lnTo>
+                  <a:pt x="422165" y="247355"/>
+                </a:lnTo>
+                <a:lnTo>
+                  <a:pt x="418000" y="231122"/>
+                </a:lnTo>
+                <a:lnTo>
+                  <a:pt x="413211" y="215062"/>
+                </a:lnTo>
+                <a:lnTo>
+                  <a:pt x="407806" y="199200"/>
+                </a:lnTo>
+                <a:lnTo>
+                  <a:pt x="401792" y="183557"/>
+                </a:lnTo>
+                <a:lnTo>
+                  <a:pt x="395178" y="168159"/>
+                </a:lnTo>
+                <a:lnTo>
+                  <a:pt x="387974" y="153028"/>
+                </a:lnTo>
+                <a:lnTo>
+                  <a:pt x="380192" y="138186"/>
+                </a:lnTo>
+                <a:lnTo>
+                  <a:pt x="371841" y="123656"/>
+                </a:lnTo>
+                <a:lnTo>
+                  <a:pt x="362936" y="109459"/>
+                </a:lnTo>
+                <a:lnTo>
+                  <a:pt x="353489" y="95617"/>
+                </a:lnTo>
+                <a:lnTo>
+                  <a:pt x="343514" y="82150"/>
+                </a:lnTo>
+                <a:lnTo>
+                  <a:pt x="333027" y="69079"/>
+                </a:lnTo>
+                <a:lnTo>
+                  <a:pt x="322042" y="56422"/>
+                </a:lnTo>
+                <a:lnTo>
+                  <a:pt x="310577" y="44199"/>
+                </a:lnTo>
+                <a:lnTo>
+                  <a:pt x="298648" y="32428"/>
+                </a:lnTo>
+                <a:lnTo>
+                  <a:pt x="286273" y="21127"/>
+                </a:lnTo>
+                <a:lnTo>
+                  <a:pt x="273471" y="10312"/>
+                </a:lnTo>
+                <a:lnTo>
+                  <a:pt x="260261" y="0"/>
+                </a:lnTo>
+                <a:close/>
+              </a:path>
+            </a:pathLst>
+          </a:custGeom>
           <a:solidFill>
             <a:srgbClr val="F2C14E"/>
           </a:solidFill>
-          <a:ln w="12700">
-            <a:solidFill>
-              <a:srgbClr val="F2C14E"/>
-            </a:solidFill>
-            <a:prstDash val="solid"/>
-          </a:ln>
+          <a:ln/>
         </p:spPr>
       </p:sp>
       <p:sp>
@@ -9807,24 +10992,103 @@
         </p:nvSpPr>
         <p:spPr>
           <a:xfrm>
-            <a:off x="3588448" y="2560891"/>
-            <a:ext cx="867537" cy="867537"/>
-          </a:xfrm>
-          <a:prstGeom prst="pie">
-            <a:avLst>
-              <a:gd name="adj1" fmla="val 10800000"/>
-              <a:gd name="adj2" fmla="val 18412194"/>
-            </a:avLst>
-          </a:prstGeom>
+            <a:off x="3588449" y="2560893"/>
+            <a:ext cx="694030" cy="433767"/>
+          </a:xfrm>
+          <a:custGeom>
+            <a:avLst/>
+            <a:gdLst/>
+            <a:ahLst/>
+            <a:cxnLst/>
+            <a:rect l="l" t="t" r="r" b="b"/>
+            <a:pathLst>
+              <a:path w="694030" h="433767">
+                <a:moveTo>
+                  <a:pt x="433768" y="433767"/>
+                </a:moveTo>
+                <a:lnTo>
+                  <a:pt x="694030" y="86753"/>
+                </a:lnTo>
+                <a:lnTo>
+                  <a:pt x="660952" y="64250"/>
+                </a:lnTo>
+                <a:lnTo>
+                  <a:pt x="625941" y="44891"/>
+                </a:lnTo>
+                <a:lnTo>
+                  <a:pt x="589296" y="28840"/>
+                </a:lnTo>
+                <a:lnTo>
+                  <a:pt x="551328" y="16233"/>
+                </a:lnTo>
+                <a:lnTo>
+                  <a:pt x="512360" y="7178"/>
+                </a:lnTo>
+                <a:lnTo>
+                  <a:pt x="472723" y="1752"/>
+                </a:lnTo>
+                <a:lnTo>
+                  <a:pt x="432755" y="0"/>
+                </a:lnTo>
+                <a:lnTo>
+                  <a:pt x="392796" y="1938"/>
+                </a:lnTo>
+                <a:lnTo>
+                  <a:pt x="353185" y="7550"/>
+                </a:lnTo>
+                <a:lnTo>
+                  <a:pt x="314260" y="16787"/>
+                </a:lnTo>
+                <a:lnTo>
+                  <a:pt x="276351" y="29571"/>
+                </a:lnTo>
+                <a:lnTo>
+                  <a:pt x="239781" y="45793"/>
+                </a:lnTo>
+                <a:lnTo>
+                  <a:pt x="204862" y="65315"/>
+                </a:lnTo>
+                <a:lnTo>
+                  <a:pt x="171889" y="87972"/>
+                </a:lnTo>
+                <a:lnTo>
+                  <a:pt x="141144" y="113570"/>
+                </a:lnTo>
+                <a:lnTo>
+                  <a:pt x="112889" y="141892"/>
+                </a:lnTo>
+                <a:lnTo>
+                  <a:pt x="87363" y="172696"/>
+                </a:lnTo>
+                <a:lnTo>
+                  <a:pt x="64783" y="205722"/>
+                </a:lnTo>
+                <a:lnTo>
+                  <a:pt x="45342" y="240687"/>
+                </a:lnTo>
+                <a:lnTo>
+                  <a:pt x="29205" y="277294"/>
+                </a:lnTo>
+                <a:lnTo>
+                  <a:pt x="16510" y="315233"/>
+                </a:lnTo>
+                <a:lnTo>
+                  <a:pt x="7364" y="354180"/>
+                </a:lnTo>
+                <a:lnTo>
+                  <a:pt x="1845" y="393804"/>
+                </a:lnTo>
+                <a:lnTo>
+                  <a:pt x="0" y="433767"/>
+                </a:lnTo>
+                <a:close/>
+              </a:path>
+            </a:pathLst>
+          </a:custGeom>
           <a:solidFill>
             <a:srgbClr val="F2C14E"/>
           </a:solidFill>
-          <a:ln w="12700">
-            <a:solidFill>
-              <a:srgbClr val="F2C14E"/>
-            </a:solidFill>
-            <a:prstDash val="solid"/>
-          </a:ln>
+          <a:ln/>
         </p:spPr>
       </p:sp>
       <p:sp>
@@ -9835,24 +11099,103 @@
         </p:nvSpPr>
         <p:spPr>
           <a:xfrm>
-            <a:off x="4771454" y="983551"/>
-            <a:ext cx="867537" cy="867537"/>
-          </a:xfrm>
-          <a:prstGeom prst="pie">
-            <a:avLst>
-              <a:gd name="adj1" fmla="val 7612194"/>
-              <a:gd name="adj2" fmla="val 10800000"/>
-            </a:avLst>
-          </a:prstGeom>
+            <a:off x="4771454" y="1417320"/>
+            <a:ext cx="433768" cy="347015"/>
+          </a:xfrm>
+          <a:custGeom>
+            <a:avLst/>
+            <a:gdLst/>
+            <a:ahLst/>
+            <a:cxnLst/>
+            <a:rect l="l" t="t" r="r" b="b"/>
+            <a:pathLst>
+              <a:path w="433768" h="347015">
+                <a:moveTo>
+                  <a:pt x="433768" y="0"/>
+                </a:moveTo>
+                <a:lnTo>
+                  <a:pt x="0" y="0"/>
+                </a:lnTo>
+                <a:lnTo>
+                  <a:pt x="324" y="16755"/>
+                </a:lnTo>
+                <a:lnTo>
+                  <a:pt x="1294" y="33486"/>
+                </a:lnTo>
+                <a:lnTo>
+                  <a:pt x="2911" y="50166"/>
+                </a:lnTo>
+                <a:lnTo>
+                  <a:pt x="5170" y="66772"/>
+                </a:lnTo>
+                <a:lnTo>
+                  <a:pt x="8069" y="83278"/>
+                </a:lnTo>
+                <a:lnTo>
+                  <a:pt x="11604" y="99660"/>
+                </a:lnTo>
+                <a:lnTo>
+                  <a:pt x="15768" y="115892"/>
+                </a:lnTo>
+                <a:lnTo>
+                  <a:pt x="20557" y="131952"/>
+                </a:lnTo>
+                <a:lnTo>
+                  <a:pt x="25962" y="147815"/>
+                </a:lnTo>
+                <a:lnTo>
+                  <a:pt x="31977" y="163458"/>
+                </a:lnTo>
+                <a:lnTo>
+                  <a:pt x="38590" y="178856"/>
+                </a:lnTo>
+                <a:lnTo>
+                  <a:pt x="45794" y="193987"/>
+                </a:lnTo>
+                <a:lnTo>
+                  <a:pt x="53577" y="208829"/>
+                </a:lnTo>
+                <a:lnTo>
+                  <a:pt x="61927" y="223359"/>
+                </a:lnTo>
+                <a:lnTo>
+                  <a:pt x="70833" y="237556"/>
+                </a:lnTo>
+                <a:lnTo>
+                  <a:pt x="80280" y="251398"/>
+                </a:lnTo>
+                <a:lnTo>
+                  <a:pt x="90255" y="264865"/>
+                </a:lnTo>
+                <a:lnTo>
+                  <a:pt x="100742" y="277936"/>
+                </a:lnTo>
+                <a:lnTo>
+                  <a:pt x="111727" y="290593"/>
+                </a:lnTo>
+                <a:lnTo>
+                  <a:pt x="123192" y="302816"/>
+                </a:lnTo>
+                <a:lnTo>
+                  <a:pt x="135121" y="314586"/>
+                </a:lnTo>
+                <a:lnTo>
+                  <a:pt x="147495" y="325888"/>
+                </a:lnTo>
+                <a:lnTo>
+                  <a:pt x="160297" y="336703"/>
+                </a:lnTo>
+                <a:lnTo>
+                  <a:pt x="173507" y="347015"/>
+                </a:lnTo>
+                <a:close/>
+              </a:path>
+            </a:pathLst>
+          </a:custGeom>
           <a:solidFill>
             <a:srgbClr val="F2C14E"/>
           </a:solidFill>
-          <a:ln w="12700">
-            <a:solidFill>
-              <a:srgbClr val="F2C14E"/>
-            </a:solidFill>
-            <a:prstDash val="solid"/>
-          </a:ln>
+          <a:ln/>
         </p:spPr>
       </p:sp>
       <p:sp>
@@ -9863,24 +11206,103 @@
         </p:nvSpPr>
         <p:spPr>
           <a:xfrm>
-            <a:off x="2799778" y="983551"/>
-            <a:ext cx="867537" cy="867537"/>
-          </a:xfrm>
-          <a:prstGeom prst="pie">
-            <a:avLst>
-              <a:gd name="adj1" fmla="val 0"/>
-              <a:gd name="adj2" fmla="val 7612194"/>
-            </a:avLst>
-          </a:prstGeom>
+            <a:off x="2973286" y="1417320"/>
+            <a:ext cx="694030" cy="433767"/>
+          </a:xfrm>
+          <a:custGeom>
+            <a:avLst/>
+            <a:gdLst/>
+            <a:ahLst/>
+            <a:cxnLst/>
+            <a:rect l="l" t="t" r="r" b="b"/>
+            <a:pathLst>
+              <a:path w="694030" h="433767">
+                <a:moveTo>
+                  <a:pt x="260261" y="0"/>
+                </a:moveTo>
+                <a:lnTo>
+                  <a:pt x="0" y="347015"/>
+                </a:lnTo>
+                <a:lnTo>
+                  <a:pt x="33078" y="369517"/>
+                </a:lnTo>
+                <a:lnTo>
+                  <a:pt x="68088" y="388876"/>
+                </a:lnTo>
+                <a:lnTo>
+                  <a:pt x="104733" y="404927"/>
+                </a:lnTo>
+                <a:lnTo>
+                  <a:pt x="142702" y="417534"/>
+                </a:lnTo>
+                <a:lnTo>
+                  <a:pt x="181670" y="426589"/>
+                </a:lnTo>
+                <a:lnTo>
+                  <a:pt x="221306" y="432016"/>
+                </a:lnTo>
+                <a:lnTo>
+                  <a:pt x="261274" y="433767"/>
+                </a:lnTo>
+                <a:lnTo>
+                  <a:pt x="301234" y="431829"/>
+                </a:lnTo>
+                <a:lnTo>
+                  <a:pt x="340844" y="426218"/>
+                </a:lnTo>
+                <a:lnTo>
+                  <a:pt x="379770" y="416981"/>
+                </a:lnTo>
+                <a:lnTo>
+                  <a:pt x="417679" y="404197"/>
+                </a:lnTo>
+                <a:lnTo>
+                  <a:pt x="454248" y="387974"/>
+                </a:lnTo>
+                <a:lnTo>
+                  <a:pt x="489168" y="368452"/>
+                </a:lnTo>
+                <a:lnTo>
+                  <a:pt x="522140" y="345795"/>
+                </a:lnTo>
+                <a:lnTo>
+                  <a:pt x="552885" y="320197"/>
+                </a:lnTo>
+                <a:lnTo>
+                  <a:pt x="581141" y="291875"/>
+                </a:lnTo>
+                <a:lnTo>
+                  <a:pt x="606667" y="261071"/>
+                </a:lnTo>
+                <a:lnTo>
+                  <a:pt x="629247" y="228046"/>
+                </a:lnTo>
+                <a:lnTo>
+                  <a:pt x="648687" y="193080"/>
+                </a:lnTo>
+                <a:lnTo>
+                  <a:pt x="664824" y="156473"/>
+                </a:lnTo>
+                <a:lnTo>
+                  <a:pt x="677520" y="118534"/>
+                </a:lnTo>
+                <a:lnTo>
+                  <a:pt x="686666" y="79588"/>
+                </a:lnTo>
+                <a:lnTo>
+                  <a:pt x="692185" y="39964"/>
+                </a:lnTo>
+                <a:lnTo>
+                  <a:pt x="694030" y="0"/>
+                </a:lnTo>
+                <a:close/>
+              </a:path>
+            </a:pathLst>
+          </a:custGeom>
           <a:solidFill>
             <a:srgbClr val="F2C14E"/>
           </a:solidFill>
-          <a:ln w="12700">
-            <a:solidFill>
-              <a:srgbClr val="F2C14E"/>
-            </a:solidFill>
-            <a:prstDash val="solid"/>
-          </a:ln>
+          <a:ln/>
         </p:spPr>
       </p:sp>
       <p:sp>
@@ -10473,24 +11895,103 @@
         </p:nvSpPr>
         <p:spPr>
           <a:xfrm>
-            <a:off x="4338231" y="4040175"/>
-            <a:ext cx="400710" cy="400710"/>
-          </a:xfrm>
-          <a:prstGeom prst="pie">
-            <a:avLst>
-              <a:gd name="adj1" fmla="val 7200044"/>
-              <a:gd name="adj2" fmla="val 14399956"/>
-            </a:avLst>
-          </a:prstGeom>
+            <a:off x="4338231" y="4067019"/>
+            <a:ext cx="200355" cy="347022"/>
+          </a:xfrm>
+          <a:custGeom>
+            <a:avLst/>
+            <a:gdLst/>
+            <a:ahLst/>
+            <a:cxnLst/>
+            <a:rect l="l" t="t" r="r" b="b"/>
+            <a:pathLst>
+              <a:path w="200355" h="347022">
+                <a:moveTo>
+                  <a:pt x="200355" y="173511"/>
+                </a:moveTo>
+                <a:lnTo>
+                  <a:pt x="100175" y="0"/>
+                </a:lnTo>
+                <a:lnTo>
+                  <a:pt x="85434" y="9391"/>
+                </a:lnTo>
+                <a:lnTo>
+                  <a:pt x="71568" y="20032"/>
+                </a:lnTo>
+                <a:lnTo>
+                  <a:pt x="58681" y="31840"/>
+                </a:lnTo>
+                <a:lnTo>
+                  <a:pt x="46873" y="44727"/>
+                </a:lnTo>
+                <a:lnTo>
+                  <a:pt x="36233" y="58594"/>
+                </a:lnTo>
+                <a:lnTo>
+                  <a:pt x="26842" y="73335"/>
+                </a:lnTo>
+                <a:lnTo>
+                  <a:pt x="18771" y="88839"/>
+                </a:lnTo>
+                <a:lnTo>
+                  <a:pt x="12083" y="104987"/>
+                </a:lnTo>
+                <a:lnTo>
+                  <a:pt x="6827" y="121656"/>
+                </a:lnTo>
+                <a:lnTo>
+                  <a:pt x="3044" y="138720"/>
+                </a:lnTo>
+                <a:lnTo>
+                  <a:pt x="762" y="156049"/>
+                </a:lnTo>
+                <a:lnTo>
+                  <a:pt x="0" y="173511"/>
+                </a:lnTo>
+                <a:lnTo>
+                  <a:pt x="762" y="190973"/>
+                </a:lnTo>
+                <a:lnTo>
+                  <a:pt x="3044" y="208302"/>
+                </a:lnTo>
+                <a:lnTo>
+                  <a:pt x="6827" y="225366"/>
+                </a:lnTo>
+                <a:lnTo>
+                  <a:pt x="12083" y="242036"/>
+                </a:lnTo>
+                <a:lnTo>
+                  <a:pt x="18771" y="258184"/>
+                </a:lnTo>
+                <a:lnTo>
+                  <a:pt x="26842" y="273688"/>
+                </a:lnTo>
+                <a:lnTo>
+                  <a:pt x="36233" y="288429"/>
+                </a:lnTo>
+                <a:lnTo>
+                  <a:pt x="46873" y="302296"/>
+                </a:lnTo>
+                <a:lnTo>
+                  <a:pt x="58681" y="315182"/>
+                </a:lnTo>
+                <a:lnTo>
+                  <a:pt x="71568" y="326991"/>
+                </a:lnTo>
+                <a:lnTo>
+                  <a:pt x="85434" y="337631"/>
+                </a:lnTo>
+                <a:lnTo>
+                  <a:pt x="100175" y="347022"/>
+                </a:lnTo>
+                <a:close/>
+              </a:path>
+            </a:pathLst>
+          </a:custGeom>
           <a:solidFill>
             <a:srgbClr val="F2C14E"/>
           </a:solidFill>
-          <a:ln w="12700">
-            <a:solidFill>
-              <a:srgbClr val="F2C14E"/>
-            </a:solidFill>
-            <a:prstDash val="solid"/>
-          </a:ln>
+          <a:ln/>
         </p:spPr>
       </p:sp>
       <p:sp>
@@ -10501,24 +12002,103 @@
         </p:nvSpPr>
         <p:spPr>
           <a:xfrm>
-            <a:off x="3882879" y="3251505"/>
-            <a:ext cx="400710" cy="400710"/>
-          </a:xfrm>
-          <a:prstGeom prst="pie">
-            <a:avLst>
-              <a:gd name="adj1" fmla="val 3599956"/>
-              <a:gd name="adj2" fmla="val 10800000"/>
-            </a:avLst>
-          </a:prstGeom>
+            <a:off x="3882879" y="3451860"/>
+            <a:ext cx="300535" cy="200355"/>
+          </a:xfrm>
+          <a:custGeom>
+            <a:avLst/>
+            <a:gdLst/>
+            <a:ahLst/>
+            <a:cxnLst/>
+            <a:rect l="l" t="t" r="r" b="b"/>
+            <a:pathLst>
+              <a:path w="300535" h="200355">
+                <a:moveTo>
+                  <a:pt x="200355" y="0"/>
+                </a:moveTo>
+                <a:lnTo>
+                  <a:pt x="0" y="0"/>
+                </a:lnTo>
+                <a:lnTo>
+                  <a:pt x="762" y="17462"/>
+                </a:lnTo>
+                <a:lnTo>
+                  <a:pt x="3044" y="34791"/>
+                </a:lnTo>
+                <a:lnTo>
+                  <a:pt x="6827" y="51856"/>
+                </a:lnTo>
+                <a:lnTo>
+                  <a:pt x="12083" y="68526"/>
+                </a:lnTo>
+                <a:lnTo>
+                  <a:pt x="18772" y="84674"/>
+                </a:lnTo>
+                <a:lnTo>
+                  <a:pt x="26843" y="100178"/>
+                </a:lnTo>
+                <a:lnTo>
+                  <a:pt x="36234" y="114919"/>
+                </a:lnTo>
+                <a:lnTo>
+                  <a:pt x="46875" y="128786"/>
+                </a:lnTo>
+                <a:lnTo>
+                  <a:pt x="58683" y="141673"/>
+                </a:lnTo>
+                <a:lnTo>
+                  <a:pt x="71570" y="153481"/>
+                </a:lnTo>
+                <a:lnTo>
+                  <a:pt x="85437" y="164122"/>
+                </a:lnTo>
+                <a:lnTo>
+                  <a:pt x="100179" y="173513"/>
+                </a:lnTo>
+                <a:lnTo>
+                  <a:pt x="115683" y="181584"/>
+                </a:lnTo>
+                <a:lnTo>
+                  <a:pt x="131831" y="188273"/>
+                </a:lnTo>
+                <a:lnTo>
+                  <a:pt x="148501" y="193528"/>
+                </a:lnTo>
+                <a:lnTo>
+                  <a:pt x="165565" y="197311"/>
+                </a:lnTo>
+                <a:lnTo>
+                  <a:pt x="182895" y="199593"/>
+                </a:lnTo>
+                <a:lnTo>
+                  <a:pt x="200357" y="200355"/>
+                </a:lnTo>
+                <a:lnTo>
+                  <a:pt x="217819" y="199592"/>
+                </a:lnTo>
+                <a:lnTo>
+                  <a:pt x="235148" y="197311"/>
+                </a:lnTo>
+                <a:lnTo>
+                  <a:pt x="252213" y="193527"/>
+                </a:lnTo>
+                <a:lnTo>
+                  <a:pt x="268883" y="188271"/>
+                </a:lnTo>
+                <a:lnTo>
+                  <a:pt x="285031" y="181582"/>
+                </a:lnTo>
+                <a:lnTo>
+                  <a:pt x="300535" y="173511"/>
+                </a:lnTo>
+                <a:close/>
+              </a:path>
+            </a:pathLst>
+          </a:custGeom>
           <a:solidFill>
             <a:srgbClr val="F2C14E"/>
           </a:solidFill>
-          <a:ln w="12700">
-            <a:solidFill>
-              <a:srgbClr val="F2C14E"/>
-            </a:solidFill>
-            <a:prstDash val="solid"/>
-          </a:ln>
+          <a:ln/>
         </p:spPr>
       </p:sp>
       <p:sp>
@@ -10529,24 +12109,103 @@
         </p:nvSpPr>
         <p:spPr>
           <a:xfrm>
-            <a:off x="2972175" y="3251505"/>
-            <a:ext cx="400710" cy="400710"/>
-          </a:xfrm>
-          <a:prstGeom prst="pie">
-            <a:avLst>
-              <a:gd name="adj1" fmla="val 0"/>
-              <a:gd name="adj2" fmla="val 7200044"/>
-            </a:avLst>
-          </a:prstGeom>
+            <a:off x="3072350" y="3451860"/>
+            <a:ext cx="300535" cy="200355"/>
+          </a:xfrm>
+          <a:custGeom>
+            <a:avLst/>
+            <a:gdLst/>
+            <a:ahLst/>
+            <a:cxnLst/>
+            <a:rect l="l" t="t" r="r" b="b"/>
+            <a:pathLst>
+              <a:path w="300535" h="200355">
+                <a:moveTo>
+                  <a:pt x="100180" y="0"/>
+                </a:moveTo>
+                <a:lnTo>
+                  <a:pt x="0" y="173511"/>
+                </a:lnTo>
+                <a:lnTo>
+                  <a:pt x="15504" y="181582"/>
+                </a:lnTo>
+                <a:lnTo>
+                  <a:pt x="31652" y="188271"/>
+                </a:lnTo>
+                <a:lnTo>
+                  <a:pt x="48322" y="193527"/>
+                </a:lnTo>
+                <a:lnTo>
+                  <a:pt x="65386" y="197311"/>
+                </a:lnTo>
+                <a:lnTo>
+                  <a:pt x="82716" y="199592"/>
+                </a:lnTo>
+                <a:lnTo>
+                  <a:pt x="100178" y="200355"/>
+                </a:lnTo>
+                <a:lnTo>
+                  <a:pt x="117640" y="199593"/>
+                </a:lnTo>
+                <a:lnTo>
+                  <a:pt x="134969" y="197311"/>
+                </a:lnTo>
+                <a:lnTo>
+                  <a:pt x="152034" y="193528"/>
+                </a:lnTo>
+                <a:lnTo>
+                  <a:pt x="168704" y="188273"/>
+                </a:lnTo>
+                <a:lnTo>
+                  <a:pt x="184852" y="181584"/>
+                </a:lnTo>
+                <a:lnTo>
+                  <a:pt x="200356" y="173513"/>
+                </a:lnTo>
+                <a:lnTo>
+                  <a:pt x="215098" y="164122"/>
+                </a:lnTo>
+                <a:lnTo>
+                  <a:pt x="228965" y="153481"/>
+                </a:lnTo>
+                <a:lnTo>
+                  <a:pt x="241851" y="141673"/>
+                </a:lnTo>
+                <a:lnTo>
+                  <a:pt x="253660" y="128786"/>
+                </a:lnTo>
+                <a:lnTo>
+                  <a:pt x="264300" y="114919"/>
+                </a:lnTo>
+                <a:lnTo>
+                  <a:pt x="273692" y="100178"/>
+                </a:lnTo>
+                <a:lnTo>
+                  <a:pt x="281763" y="84674"/>
+                </a:lnTo>
+                <a:lnTo>
+                  <a:pt x="288452" y="68526"/>
+                </a:lnTo>
+                <a:lnTo>
+                  <a:pt x="293708" y="51856"/>
+                </a:lnTo>
+                <a:lnTo>
+                  <a:pt x="297491" y="34791"/>
+                </a:lnTo>
+                <a:lnTo>
+                  <a:pt x="299772" y="17462"/>
+                </a:lnTo>
+                <a:lnTo>
+                  <a:pt x="300535" y="0"/>
+                </a:lnTo>
+                <a:close/>
+              </a:path>
+            </a:pathLst>
+          </a:custGeom>
           <a:solidFill>
             <a:srgbClr val="F2C14E"/>
           </a:solidFill>
-          <a:ln w="12700">
-            <a:solidFill>
-              <a:srgbClr val="F2C14E"/>
-            </a:solidFill>
-            <a:prstDash val="solid"/>
-          </a:ln>
+          <a:ln/>
         </p:spPr>
       </p:sp>
       <p:sp>
@@ -10557,24 +12216,103 @@
         </p:nvSpPr>
         <p:spPr>
           <a:xfrm>
-            <a:off x="2516823" y="4040175"/>
-            <a:ext cx="400710" cy="400710"/>
-          </a:xfrm>
-          <a:prstGeom prst="pie">
-            <a:avLst>
-              <a:gd name="adj1" fmla="val 18000044"/>
-              <a:gd name="adj2" fmla="val 3599956"/>
-            </a:avLst>
-          </a:prstGeom>
+            <a:off x="2717178" y="4067019"/>
+            <a:ext cx="200355" cy="347022"/>
+          </a:xfrm>
+          <a:custGeom>
+            <a:avLst/>
+            <a:gdLst/>
+            <a:ahLst/>
+            <a:cxnLst/>
+            <a:rect l="l" t="t" r="r" b="b"/>
+            <a:pathLst>
+              <a:path w="200355" h="347022">
+                <a:moveTo>
+                  <a:pt x="0" y="173511"/>
+                </a:moveTo>
+                <a:lnTo>
+                  <a:pt x="100180" y="347022"/>
+                </a:lnTo>
+                <a:lnTo>
+                  <a:pt x="114921" y="337631"/>
+                </a:lnTo>
+                <a:lnTo>
+                  <a:pt x="128787" y="326991"/>
+                </a:lnTo>
+                <a:lnTo>
+                  <a:pt x="141674" y="315182"/>
+                </a:lnTo>
+                <a:lnTo>
+                  <a:pt x="153482" y="302296"/>
+                </a:lnTo>
+                <a:lnTo>
+                  <a:pt x="164122" y="288429"/>
+                </a:lnTo>
+                <a:lnTo>
+                  <a:pt x="173513" y="273688"/>
+                </a:lnTo>
+                <a:lnTo>
+                  <a:pt x="181584" y="258184"/>
+                </a:lnTo>
+                <a:lnTo>
+                  <a:pt x="188272" y="242036"/>
+                </a:lnTo>
+                <a:lnTo>
+                  <a:pt x="193528" y="225366"/>
+                </a:lnTo>
+                <a:lnTo>
+                  <a:pt x="197311" y="208302"/>
+                </a:lnTo>
+                <a:lnTo>
+                  <a:pt x="199593" y="190973"/>
+                </a:lnTo>
+                <a:lnTo>
+                  <a:pt x="200355" y="173511"/>
+                </a:lnTo>
+                <a:lnTo>
+                  <a:pt x="199593" y="156049"/>
+                </a:lnTo>
+                <a:lnTo>
+                  <a:pt x="197311" y="138720"/>
+                </a:lnTo>
+                <a:lnTo>
+                  <a:pt x="193528" y="121656"/>
+                </a:lnTo>
+                <a:lnTo>
+                  <a:pt x="188272" y="104987"/>
+                </a:lnTo>
+                <a:lnTo>
+                  <a:pt x="181584" y="88839"/>
+                </a:lnTo>
+                <a:lnTo>
+                  <a:pt x="173513" y="73335"/>
+                </a:lnTo>
+                <a:lnTo>
+                  <a:pt x="164122" y="58594"/>
+                </a:lnTo>
+                <a:lnTo>
+                  <a:pt x="153482" y="44727"/>
+                </a:lnTo>
+                <a:lnTo>
+                  <a:pt x="141674" y="31840"/>
+                </a:lnTo>
+                <a:lnTo>
+                  <a:pt x="128787" y="20032"/>
+                </a:lnTo>
+                <a:lnTo>
+                  <a:pt x="114921" y="9391"/>
+                </a:lnTo>
+                <a:lnTo>
+                  <a:pt x="100180" y="0"/>
+                </a:lnTo>
+                <a:close/>
+              </a:path>
+            </a:pathLst>
+          </a:custGeom>
           <a:solidFill>
             <a:srgbClr val="F2C14E"/>
           </a:solidFill>
-          <a:ln w="12700">
-            <a:solidFill>
-              <a:srgbClr val="F2C14E"/>
-            </a:solidFill>
-            <a:prstDash val="solid"/>
-          </a:ln>
+          <a:ln/>
         </p:spPr>
       </p:sp>
       <p:sp>
@@ -10585,24 +12323,103 @@
         </p:nvSpPr>
         <p:spPr>
           <a:xfrm>
-            <a:off x="2972175" y="4828845"/>
-            <a:ext cx="400710" cy="400710"/>
-          </a:xfrm>
-          <a:prstGeom prst="pie">
-            <a:avLst>
-              <a:gd name="adj1" fmla="val 14399956"/>
-              <a:gd name="adj2" fmla="val 0"/>
-            </a:avLst>
-          </a:prstGeom>
+            <a:off x="3072350" y="4828845"/>
+            <a:ext cx="300535" cy="200355"/>
+          </a:xfrm>
+          <a:custGeom>
+            <a:avLst/>
+            <a:gdLst/>
+            <a:ahLst/>
+            <a:cxnLst/>
+            <a:rect l="l" t="t" r="r" b="b"/>
+            <a:pathLst>
+              <a:path w="300535" h="200355">
+                <a:moveTo>
+                  <a:pt x="100180" y="200355"/>
+                </a:moveTo>
+                <a:lnTo>
+                  <a:pt x="300535" y="200355"/>
+                </a:lnTo>
+                <a:lnTo>
+                  <a:pt x="299772" y="182893"/>
+                </a:lnTo>
+                <a:lnTo>
+                  <a:pt x="297491" y="165563"/>
+                </a:lnTo>
+                <a:lnTo>
+                  <a:pt x="293708" y="148499"/>
+                </a:lnTo>
+                <a:lnTo>
+                  <a:pt x="288452" y="131829"/>
+                </a:lnTo>
+                <a:lnTo>
+                  <a:pt x="281763" y="115681"/>
+                </a:lnTo>
+                <a:lnTo>
+                  <a:pt x="273692" y="100177"/>
+                </a:lnTo>
+                <a:lnTo>
+                  <a:pt x="264300" y="85435"/>
+                </a:lnTo>
+                <a:lnTo>
+                  <a:pt x="253660" y="71569"/>
+                </a:lnTo>
+                <a:lnTo>
+                  <a:pt x="241851" y="58682"/>
+                </a:lnTo>
+                <a:lnTo>
+                  <a:pt x="228965" y="46873"/>
+                </a:lnTo>
+                <a:lnTo>
+                  <a:pt x="215098" y="36233"/>
+                </a:lnTo>
+                <a:lnTo>
+                  <a:pt x="200356" y="26842"/>
+                </a:lnTo>
+                <a:lnTo>
+                  <a:pt x="184852" y="18771"/>
+                </a:lnTo>
+                <a:lnTo>
+                  <a:pt x="168704" y="12082"/>
+                </a:lnTo>
+                <a:lnTo>
+                  <a:pt x="152034" y="6827"/>
+                </a:lnTo>
+                <a:lnTo>
+                  <a:pt x="134969" y="3044"/>
+                </a:lnTo>
+                <a:lnTo>
+                  <a:pt x="117640" y="762"/>
+                </a:lnTo>
+                <a:lnTo>
+                  <a:pt x="100178" y="0"/>
+                </a:lnTo>
+                <a:lnTo>
+                  <a:pt x="82716" y="763"/>
+                </a:lnTo>
+                <a:lnTo>
+                  <a:pt x="65386" y="3044"/>
+                </a:lnTo>
+                <a:lnTo>
+                  <a:pt x="48322" y="6828"/>
+                </a:lnTo>
+                <a:lnTo>
+                  <a:pt x="31652" y="12084"/>
+                </a:lnTo>
+                <a:lnTo>
+                  <a:pt x="15504" y="18773"/>
+                </a:lnTo>
+                <a:lnTo>
+                  <a:pt x="0" y="26844"/>
+                </a:lnTo>
+                <a:close/>
+              </a:path>
+            </a:pathLst>
+          </a:custGeom>
           <a:solidFill>
             <a:srgbClr val="F2C14E"/>
           </a:solidFill>
-          <a:ln w="12700">
-            <a:solidFill>
-              <a:srgbClr val="F2C14E"/>
-            </a:solidFill>
-            <a:prstDash val="solid"/>
-          </a:ln>
+          <a:ln/>
         </p:spPr>
       </p:sp>
       <p:sp>
@@ -10614,23 +12431,102 @@
         <p:spPr>
           <a:xfrm>
             <a:off x="3882879" y="4828845"/>
-            <a:ext cx="400710" cy="400710"/>
-          </a:xfrm>
-          <a:prstGeom prst="pie">
-            <a:avLst>
-              <a:gd name="adj1" fmla="val 10800000"/>
-              <a:gd name="adj2" fmla="val 18000044"/>
-            </a:avLst>
-          </a:prstGeom>
+            <a:ext cx="300535" cy="200355"/>
+          </a:xfrm>
+          <a:custGeom>
+            <a:avLst/>
+            <a:gdLst/>
+            <a:ahLst/>
+            <a:cxnLst/>
+            <a:rect l="l" t="t" r="r" b="b"/>
+            <a:pathLst>
+              <a:path w="300535" h="200355">
+                <a:moveTo>
+                  <a:pt x="200355" y="200355"/>
+                </a:moveTo>
+                <a:lnTo>
+                  <a:pt x="300535" y="26844"/>
+                </a:lnTo>
+                <a:lnTo>
+                  <a:pt x="285031" y="18773"/>
+                </a:lnTo>
+                <a:lnTo>
+                  <a:pt x="268883" y="12084"/>
+                </a:lnTo>
+                <a:lnTo>
+                  <a:pt x="252213" y="6828"/>
+                </a:lnTo>
+                <a:lnTo>
+                  <a:pt x="235148" y="3044"/>
+                </a:lnTo>
+                <a:lnTo>
+                  <a:pt x="217819" y="763"/>
+                </a:lnTo>
+                <a:lnTo>
+                  <a:pt x="200357" y="0"/>
+                </a:lnTo>
+                <a:lnTo>
+                  <a:pt x="182895" y="762"/>
+                </a:lnTo>
+                <a:lnTo>
+                  <a:pt x="165565" y="3044"/>
+                </a:lnTo>
+                <a:lnTo>
+                  <a:pt x="148501" y="6827"/>
+                </a:lnTo>
+                <a:lnTo>
+                  <a:pt x="131831" y="12082"/>
+                </a:lnTo>
+                <a:lnTo>
+                  <a:pt x="115683" y="18771"/>
+                </a:lnTo>
+                <a:lnTo>
+                  <a:pt x="100179" y="26842"/>
+                </a:lnTo>
+                <a:lnTo>
+                  <a:pt x="85437" y="36233"/>
+                </a:lnTo>
+                <a:lnTo>
+                  <a:pt x="71570" y="46873"/>
+                </a:lnTo>
+                <a:lnTo>
+                  <a:pt x="58683" y="58682"/>
+                </a:lnTo>
+                <a:lnTo>
+                  <a:pt x="46875" y="71569"/>
+                </a:lnTo>
+                <a:lnTo>
+                  <a:pt x="36234" y="85435"/>
+                </a:lnTo>
+                <a:lnTo>
+                  <a:pt x="26843" y="100177"/>
+                </a:lnTo>
+                <a:lnTo>
+                  <a:pt x="18772" y="115681"/>
+                </a:lnTo>
+                <a:lnTo>
+                  <a:pt x="12083" y="131829"/>
+                </a:lnTo>
+                <a:lnTo>
+                  <a:pt x="6827" y="148499"/>
+                </a:lnTo>
+                <a:lnTo>
+                  <a:pt x="3044" y="165563"/>
+                </a:lnTo>
+                <a:lnTo>
+                  <a:pt x="762" y="182893"/>
+                </a:lnTo>
+                <a:lnTo>
+                  <a:pt x="0" y="200355"/>
+                </a:lnTo>
+                <a:close/>
+              </a:path>
+            </a:pathLst>
+          </a:custGeom>
           <a:solidFill>
             <a:srgbClr val="F2C14E"/>
           </a:solidFill>
-          <a:ln w="12700">
-            <a:solidFill>
-              <a:srgbClr val="F2C14E"/>
-            </a:solidFill>
-            <a:prstDash val="solid"/>
-          </a:ln>
+          <a:ln/>
         </p:spPr>
       </p:sp>
       <p:sp>
